--- a/topic07-recursive-functions/unit-07a-lectures/talk-2/b-tail-recursion.pptx
+++ b/topic07-recursive-functions/unit-07a-lectures/talk-2/b-tail-recursion.pptx
@@ -527,14 +527,14 @@
           </a:ln>
           <a:extLst>
             <a:ext uri="{909E8E84-426E-40dd-AFC4-6F175D3DCCD1}">
-              <a14:hiddenFill xmlns="" xmlns:a14="http://schemas.microsoft.com/office/drawing/2010/main">
+              <a14:hiddenFill xmlns:a14="http://schemas.microsoft.com/office/drawing/2010/main" xmlns="">
                 <a:solidFill>
                   <a:srgbClr val="FFFFFF"/>
                 </a:solidFill>
               </a14:hiddenFill>
             </a:ext>
             <a:ext uri="{FAA26D3D-D897-4be2-8F04-BA451C77F1D7}">
-              <ma14:placeholderFlag xmlns="" xmlns:ma14="http://schemas.microsoft.com/office/mac/drawingml/2011/main" val="1"/>
+              <ma14:placeholderFlag xmlns:ma14="http://schemas.microsoft.com/office/mac/drawingml/2011/main" xmlns="" val="1"/>
             </a:ext>
           </a:extLst>
         </p:spPr>
@@ -1112,7 +1112,7 @@
             <a:fld id="{08B9EBBA-996F-894A-B54A-D6246ED52CEA}" type="datetimeFigureOut">
               <a:rPr lang="en-US" smtClean="0"/>
               <a:pPr/>
-              <a:t>3/14/25</a:t>
+              <a:t>2/27/26</a:t>
             </a:fld>
             <a:endParaRPr lang="en-US" dirty="0"/>
           </a:p>
@@ -1534,7 +1534,7 @@
             <a:fld id="{09B482E8-6E0E-1B4F-B1FD-C69DB9E858D9}" type="datetimeFigureOut">
               <a:rPr lang="en-US" smtClean="0"/>
               <a:pPr/>
-              <a:t>3/14/25</a:t>
+              <a:t>2/27/26</a:t>
             </a:fld>
             <a:endParaRPr lang="en-US" dirty="0"/>
           </a:p>
@@ -1878,7 +1878,7 @@
             <a:fld id="{09B482E8-6E0E-1B4F-B1FD-C69DB9E858D9}" type="datetimeFigureOut">
               <a:rPr lang="en-US" smtClean="0"/>
               <a:pPr/>
-              <a:t>3/14/25</a:t>
+              <a:t>2/27/26</a:t>
             </a:fld>
             <a:endParaRPr lang="en-US" dirty="0"/>
           </a:p>
@@ -2291,7 +2291,7 @@
             <a:fld id="{09B482E8-6E0E-1B4F-B1FD-C69DB9E858D9}" type="datetimeFigureOut">
               <a:rPr lang="en-US" smtClean="0"/>
               <a:pPr/>
-              <a:t>3/14/25</a:t>
+              <a:t>2/27/26</a:t>
             </a:fld>
             <a:endParaRPr lang="en-US" dirty="0"/>
           </a:p>
@@ -2867,7 +2867,7 @@
             <a:fld id="{09B482E8-6E0E-1B4F-B1FD-C69DB9E858D9}" type="datetimeFigureOut">
               <a:rPr lang="en-US" smtClean="0"/>
               <a:pPr/>
-              <a:t>3/14/25</a:t>
+              <a:t>2/27/26</a:t>
             </a:fld>
             <a:endParaRPr lang="en-US" dirty="0"/>
           </a:p>
@@ -3556,7 +3556,7 @@
             <a:fld id="{09B482E8-6E0E-1B4F-B1FD-C69DB9E858D9}" type="datetimeFigureOut">
               <a:rPr lang="en-US" smtClean="0"/>
               <a:pPr/>
-              <a:t>3/14/25</a:t>
+              <a:t>2/27/26</a:t>
             </a:fld>
             <a:endParaRPr lang="en-US" dirty="0"/>
           </a:p>
@@ -4477,7 +4477,7 @@
             <a:fld id="{09B482E8-6E0E-1B4F-B1FD-C69DB9E858D9}" type="datetimeFigureOut">
               <a:rPr lang="en-US" smtClean="0"/>
               <a:pPr/>
-              <a:t>3/14/25</a:t>
+              <a:t>2/27/26</a:t>
             </a:fld>
             <a:endParaRPr lang="en-US" dirty="0"/>
           </a:p>
@@ -4798,7 +4798,7 @@
             <a:fld id="{09B482E8-6E0E-1B4F-B1FD-C69DB9E858D9}" type="datetimeFigureOut">
               <a:rPr lang="en-US" smtClean="0"/>
               <a:pPr/>
-              <a:t>3/14/25</a:t>
+              <a:t>2/27/26</a:t>
             </a:fld>
             <a:endParaRPr lang="en-US" dirty="0"/>
           </a:p>
@@ -5069,7 +5069,7 @@
             <a:fld id="{09B482E8-6E0E-1B4F-B1FD-C69DB9E858D9}" type="datetimeFigureOut">
               <a:rPr lang="en-US" smtClean="0"/>
               <a:pPr/>
-              <a:t>3/14/25</a:t>
+              <a:t>2/27/26</a:t>
             </a:fld>
             <a:endParaRPr lang="en-US" dirty="0"/>
           </a:p>
@@ -5399,7 +5399,7 @@
             <a:fld id="{09B482E8-6E0E-1B4F-B1FD-C69DB9E858D9}" type="datetimeFigureOut">
               <a:rPr lang="en-US" smtClean="0"/>
               <a:pPr/>
-              <a:t>3/14/25</a:t>
+              <a:t>2/27/26</a:t>
             </a:fld>
             <a:endParaRPr lang="en-US" dirty="0"/>
           </a:p>
@@ -5795,7 +5795,7 @@
             <a:fld id="{8DFA1846-DA80-1C48-A609-854EA85C59AD}" type="datetimeFigureOut">
               <a:rPr lang="en-US" smtClean="0"/>
               <a:pPr/>
-              <a:t>3/14/25</a:t>
+              <a:t>2/27/26</a:t>
             </a:fld>
             <a:endParaRPr lang="en-US" dirty="0"/>
           </a:p>
@@ -6178,7 +6178,7 @@
             <a:fld id="{09B482E8-6E0E-1B4F-B1FD-C69DB9E858D9}" type="datetimeFigureOut">
               <a:rPr lang="en-US" smtClean="0"/>
               <a:pPr/>
-              <a:t>3/14/25</a:t>
+              <a:t>2/27/26</a:t>
             </a:fld>
             <a:endParaRPr lang="en-US" dirty="0"/>
           </a:p>
@@ -6691,7 +6691,7 @@
             <a:fld id="{09B482E8-6E0E-1B4F-B1FD-C69DB9E858D9}" type="datetimeFigureOut">
               <a:rPr lang="en-US" smtClean="0"/>
               <a:pPr/>
-              <a:t>3/14/25</a:t>
+              <a:t>2/27/26</a:t>
             </a:fld>
             <a:endParaRPr lang="en-US" dirty="0"/>
           </a:p>
@@ -6955,7 +6955,7 @@
             <a:fld id="{F13A34C8-038E-2045-AF43-DF7DBB8E0E9E}" type="datetimeFigureOut">
               <a:rPr lang="en-US" smtClean="0"/>
               <a:pPr/>
-              <a:t>3/14/25</a:t>
+              <a:t>2/27/26</a:t>
             </a:fld>
             <a:endParaRPr lang="en-US" dirty="0"/>
           </a:p>
@@ -7106,6 +7106,13 @@
             <a:schemeClr val="lt1"/>
           </a:fontRef>
         </p:style>
+        <p:txBody>
+          <a:bodyPr/>
+          <a:lstStyle/>
+          <a:p>
+            <a:endParaRPr lang="en-US"/>
+          </a:p>
+        </p:txBody>
       </p:sp>
       <p:sp>
         <p:nvSpPr>
@@ -7125,7 +7132,7 @@
             <a:fld id="{8818C68F-D26B-8F47-958C-23B49CF8A634}" type="datetimeFigureOut">
               <a:rPr lang="en-US" smtClean="0"/>
               <a:pPr/>
-              <a:t>3/14/25</a:t>
+              <a:t>2/27/26</a:t>
             </a:fld>
             <a:endParaRPr lang="en-US" dirty="0"/>
           </a:p>
@@ -7522,7 +7529,7 @@
             <a:fld id="{09B482E8-6E0E-1B4F-B1FD-C69DB9E858D9}" type="datetimeFigureOut">
               <a:rPr lang="en-US" smtClean="0"/>
               <a:pPr/>
-              <a:t>3/14/25</a:t>
+              <a:t>2/27/26</a:t>
             </a:fld>
             <a:endParaRPr lang="en-US" dirty="0"/>
           </a:p>
@@ -7938,7 +7945,7 @@
             <a:fld id="{09B482E8-6E0E-1B4F-B1FD-C69DB9E858D9}" type="datetimeFigureOut">
               <a:rPr lang="en-US" smtClean="0"/>
               <a:pPr/>
-              <a:t>3/14/25</a:t>
+              <a:t>2/27/26</a:t>
             </a:fld>
             <a:endParaRPr lang="en-US" dirty="0"/>
           </a:p>
@@ -8189,7 +8196,7 @@
             <a:fld id="{09B482E8-6E0E-1B4F-B1FD-C69DB9E858D9}" type="datetimeFigureOut">
               <a:rPr lang="en-US" smtClean="0"/>
               <a:pPr/>
-              <a:t>3/14/25</a:t>
+              <a:t>2/27/26</a:t>
             </a:fld>
             <a:endParaRPr lang="en-US" dirty="0"/>
           </a:p>
@@ -8626,14 +8633,14 @@
           <a:noFill/>
           <a:extLst>
             <a:ext uri="{909E8E84-426E-40dd-AFC4-6F175D3DCCD1}">
-              <a14:hiddenFill xmlns="" xmlns:a14="http://schemas.microsoft.com/office/drawing/2010/main">
+              <a14:hiddenFill xmlns:a14="http://schemas.microsoft.com/office/drawing/2010/main" xmlns="">
                 <a:solidFill>
                   <a:srgbClr val="FFFFFF"/>
                 </a:solidFill>
               </a14:hiddenFill>
             </a:ext>
             <a:ext uri="{91240B29-F687-4f45-9708-019B960494DF}">
-              <a14:hiddenLine xmlns="" xmlns:a14="http://schemas.microsoft.com/office/drawing/2010/main" w="9525">
+              <a14:hiddenLine xmlns:a14="http://schemas.microsoft.com/office/drawing/2010/main" xmlns="" w="9525">
                 <a:solidFill>
                   <a:srgbClr val="000000"/>
                 </a:solidFill>
@@ -8841,7 +8848,17 @@
               <a:rPr kumimoji="1" lang="en-US" sz="3200" dirty="0">
                 <a:cs typeface="+mn-cs"/>
               </a:rPr>
-              <a:t>Chapter 6.2 – Tail Recursion</a:t>
+              <a:t>Topic </a:t>
+            </a:r>
+            <a:r>
+              <a:rPr kumimoji="1" lang="en-US" sz="3200" dirty="0"/>
+              <a:t>7</a:t>
+            </a:r>
+            <a:r>
+              <a:rPr kumimoji="1" lang="en-US" sz="3200" dirty="0">
+                <a:cs typeface="+mn-cs"/>
+              </a:rPr>
+              <a:t>.2 – Tail Recursion</a:t>
             </a:r>
           </a:p>
         </p:txBody>
@@ -8881,14 +8898,14 @@
           </a:ln>
           <a:extLst>
             <a:ext uri="{909E8E84-426E-40dd-AFC4-6F175D3DCCD1}">
-              <a14:hiddenFill xmlns="" xmlns:a14="http://schemas.microsoft.com/office/drawing/2010/main">
+              <a14:hiddenFill xmlns:a14="http://schemas.microsoft.com/office/drawing/2010/main" xmlns="">
                 <a:solidFill>
                   <a:srgbClr val="FFFFFF"/>
                 </a:solidFill>
               </a14:hiddenFill>
             </a:ext>
             <a:ext uri="{91240B29-F687-4f45-9708-019B960494DF}">
-              <a14:hiddenLine xmlns="" xmlns:a14="http://schemas.microsoft.com/office/drawing/2010/main" w="9525">
+              <a14:hiddenLine xmlns:a14="http://schemas.microsoft.com/office/drawing/2010/main" xmlns="" w="9525">
                 <a:solidFill>
                   <a:srgbClr val="000000"/>
                 </a:solidFill>
@@ -8969,14 +8986,14 @@
         <p:spPr>
           <a:extLst>
             <a:ext uri="{909E8E84-426E-40dd-AFC4-6F175D3DCCD1}">
-              <a14:hiddenFill xmlns="" xmlns:a14="http://schemas.microsoft.com/office/drawing/2010/main">
+              <a14:hiddenFill xmlns:a14="http://schemas.microsoft.com/office/drawing/2010/main" xmlns="">
                 <a:solidFill>
                   <a:srgbClr val="FFFFFF"/>
                 </a:solidFill>
               </a14:hiddenFill>
             </a:ext>
             <a:ext uri="{91240B29-F687-4f45-9708-019B960494DF}">
-              <a14:hiddenLine xmlns="" xmlns:a14="http://schemas.microsoft.com/office/drawing/2010/main" w="9525">
+              <a14:hiddenLine xmlns:a14="http://schemas.microsoft.com/office/drawing/2010/main" xmlns="" w="9525">
                 <a:solidFill>
                   <a:srgbClr val="000000"/>
                 </a:solidFill>
@@ -9195,14 +9212,14 @@
           <a:noFill/>
           <a:extLst>
             <a:ext uri="{909E8E84-426E-40dd-AFC4-6F175D3DCCD1}">
-              <a14:hiddenFill xmlns="" xmlns:a14="http://schemas.microsoft.com/office/drawing/2010/main">
+              <a14:hiddenFill xmlns:a14="http://schemas.microsoft.com/office/drawing/2010/main" xmlns="">
                 <a:solidFill>
                   <a:srgbClr val="FFFFFF"/>
                 </a:solidFill>
               </a14:hiddenFill>
             </a:ext>
             <a:ext uri="{91240B29-F687-4f45-9708-019B960494DF}">
-              <a14:hiddenLine xmlns="" xmlns:a14="http://schemas.microsoft.com/office/drawing/2010/main" w="9525">
+              <a14:hiddenLine xmlns:a14="http://schemas.microsoft.com/office/drawing/2010/main" xmlns="" w="9525">
                 <a:solidFill>
                   <a:srgbClr val="000000"/>
                 </a:solidFill>
@@ -9528,14 +9545,14 @@
           <a:effectLst/>
           <a:extLst>
             <a:ext uri="{909E8E84-426E-40dd-AFC4-6F175D3DCCD1}">
-              <a14:hiddenFill xmlns:a14="http://schemas.microsoft.com/office/drawing/2010/main" xmlns="">
+              <a14:hiddenFill xmlns="" xmlns:a14="http://schemas.microsoft.com/office/drawing/2010/main">
                 <a:solidFill>
                   <a:schemeClr val="accent1"/>
                 </a:solidFill>
               </a14:hiddenFill>
             </a:ext>
             <a:ext uri="{AF507438-7753-43e0-B8FC-AC1667EBCBE1}">
-              <a14:hiddenEffects xmlns:a14="http://schemas.microsoft.com/office/drawing/2010/main" xmlns="">
+              <a14:hiddenEffects xmlns="" xmlns:a14="http://schemas.microsoft.com/office/drawing/2010/main">
                 <a:effectLst>
                   <a:outerShdw blurRad="63500" dist="35921" dir="2700000" algn="ctr" rotWithShape="0">
                     <a:schemeClr val="bg2"/>
@@ -10082,14 +10099,14 @@
           <a:noFill/>
           <a:extLst>
             <a:ext uri="{909E8E84-426E-40dd-AFC4-6F175D3DCCD1}">
-              <a14:hiddenFill xmlns:a14="http://schemas.microsoft.com/office/drawing/2010/main" xmlns="">
+              <a14:hiddenFill xmlns="" xmlns:a14="http://schemas.microsoft.com/office/drawing/2010/main">
                 <a:solidFill>
                   <a:srgbClr val="FFFFFF"/>
                 </a:solidFill>
               </a14:hiddenFill>
             </a:ext>
             <a:ext uri="{91240B29-F687-4f45-9708-019B960494DF}">
-              <a14:hiddenLine xmlns:a14="http://schemas.microsoft.com/office/drawing/2010/main" xmlns="" w="9525">
+              <a14:hiddenLine xmlns="" xmlns:a14="http://schemas.microsoft.com/office/drawing/2010/main" w="9525">
                 <a:solidFill>
                   <a:srgbClr val="000000"/>
                 </a:solidFill>
@@ -10980,14 +10997,14 @@
           <a:noFill/>
           <a:extLst>
             <a:ext uri="{909E8E84-426E-40dd-AFC4-6F175D3DCCD1}">
-              <a14:hiddenFill xmlns="" xmlns:a14="http://schemas.microsoft.com/office/drawing/2010/main">
+              <a14:hiddenFill xmlns:a14="http://schemas.microsoft.com/office/drawing/2010/main" xmlns="">
                 <a:solidFill>
                   <a:srgbClr val="FFFFFF"/>
                 </a:solidFill>
               </a14:hiddenFill>
             </a:ext>
             <a:ext uri="{91240B29-F687-4f45-9708-019B960494DF}">
-              <a14:hiddenLine xmlns="" xmlns:a14="http://schemas.microsoft.com/office/drawing/2010/main" w="9525">
+              <a14:hiddenLine xmlns:a14="http://schemas.microsoft.com/office/drawing/2010/main" xmlns="" w="9525">
                 <a:solidFill>
                   <a:srgbClr val="000000"/>
                 </a:solidFill>
@@ -12479,14 +12496,14 @@
           <a:noFill/>
           <a:extLst>
             <a:ext uri="{909E8E84-426E-40dd-AFC4-6F175D3DCCD1}">
-              <a14:hiddenFill xmlns:a14="http://schemas.microsoft.com/office/drawing/2010/main" xmlns="">
+              <a14:hiddenFill xmlns="" xmlns:a14="http://schemas.microsoft.com/office/drawing/2010/main">
                 <a:solidFill>
                   <a:srgbClr val="FFFFFF"/>
                 </a:solidFill>
               </a14:hiddenFill>
             </a:ext>
             <a:ext uri="{91240B29-F687-4f45-9708-019B960494DF}">
-              <a14:hiddenLine xmlns:a14="http://schemas.microsoft.com/office/drawing/2010/main" xmlns="" w="9525">
+              <a14:hiddenLine xmlns="" xmlns:a14="http://schemas.microsoft.com/office/drawing/2010/main" w="9525">
                 <a:solidFill>
                   <a:srgbClr val="000000"/>
                 </a:solidFill>
@@ -12823,14 +12840,14 @@
           <a:effectLst/>
           <a:extLst>
             <a:ext uri="{909E8E84-426E-40dd-AFC4-6F175D3DCCD1}">
-              <a14:hiddenFill xmlns:a14="http://schemas.microsoft.com/office/drawing/2010/main" xmlns="">
+              <a14:hiddenFill xmlns="" xmlns:a14="http://schemas.microsoft.com/office/drawing/2010/main">
                 <a:solidFill>
                   <a:schemeClr val="accent1"/>
                 </a:solidFill>
               </a14:hiddenFill>
             </a:ext>
             <a:ext uri="{AF507438-7753-43e0-B8FC-AC1667EBCBE1}">
-              <a14:hiddenEffects xmlns:a14="http://schemas.microsoft.com/office/drawing/2010/main" xmlns="">
+              <a14:hiddenEffects xmlns="" xmlns:a14="http://schemas.microsoft.com/office/drawing/2010/main">
                 <a:effectLst>
                   <a:outerShdw blurRad="63500" dist="35921" dir="2700000" algn="ctr" rotWithShape="0">
                     <a:schemeClr val="bg2"/>
@@ -13180,14 +13197,14 @@
           <a:noFill/>
           <a:extLst>
             <a:ext uri="{909E8E84-426E-40dd-AFC4-6F175D3DCCD1}">
-              <a14:hiddenFill xmlns="" xmlns:a14="http://schemas.microsoft.com/office/drawing/2010/main">
+              <a14:hiddenFill xmlns:a14="http://schemas.microsoft.com/office/drawing/2010/main" xmlns="">
                 <a:solidFill>
                   <a:srgbClr val="FFFFFF"/>
                 </a:solidFill>
               </a14:hiddenFill>
             </a:ext>
             <a:ext uri="{91240B29-F687-4f45-9708-019B960494DF}">
-              <a14:hiddenLine xmlns="" xmlns:a14="http://schemas.microsoft.com/office/drawing/2010/main" w="9525">
+              <a14:hiddenLine xmlns:a14="http://schemas.microsoft.com/office/drawing/2010/main" xmlns="" w="9525">
                 <a:solidFill>
                   <a:srgbClr val="000000"/>
                 </a:solidFill>
@@ -13805,14 +13822,14 @@
           <a:noFill/>
           <a:extLst>
             <a:ext uri="{909E8E84-426E-40dd-AFC4-6F175D3DCCD1}">
-              <a14:hiddenFill xmlns:a14="http://schemas.microsoft.com/office/drawing/2010/main" xmlns="">
+              <a14:hiddenFill xmlns="" xmlns:a14="http://schemas.microsoft.com/office/drawing/2010/main">
                 <a:solidFill>
                   <a:srgbClr val="FFFFFF"/>
                 </a:solidFill>
               </a14:hiddenFill>
             </a:ext>
             <a:ext uri="{91240B29-F687-4f45-9708-019B960494DF}">
-              <a14:hiddenLine xmlns:a14="http://schemas.microsoft.com/office/drawing/2010/main" xmlns="" w="9525">
+              <a14:hiddenLine xmlns="" xmlns:a14="http://schemas.microsoft.com/office/drawing/2010/main" w="9525">
                 <a:solidFill>
                   <a:srgbClr val="000000"/>
                 </a:solidFill>
@@ -15292,14 +15309,14 @@
           <a:noFill/>
           <a:extLst>
             <a:ext uri="{909E8E84-426E-40dd-AFC4-6F175D3DCCD1}">
-              <a14:hiddenFill xmlns="" xmlns:a14="http://schemas.microsoft.com/office/drawing/2010/main">
+              <a14:hiddenFill xmlns:a14="http://schemas.microsoft.com/office/drawing/2010/main" xmlns="">
                 <a:solidFill>
                   <a:srgbClr val="FFFFFF"/>
                 </a:solidFill>
               </a14:hiddenFill>
             </a:ext>
             <a:ext uri="{91240B29-F687-4f45-9708-019B960494DF}">
-              <a14:hiddenLine xmlns="" xmlns:a14="http://schemas.microsoft.com/office/drawing/2010/main" w="9525">
+              <a14:hiddenLine xmlns:a14="http://schemas.microsoft.com/office/drawing/2010/main" xmlns="" w="9525">
                 <a:solidFill>
                   <a:srgbClr val="000000"/>
                 </a:solidFill>
@@ -15458,14 +15475,14 @@
           </a:ln>
           <a:extLst>
             <a:ext uri="{909E8E84-426E-40dd-AFC4-6F175D3DCCD1}">
-              <a14:hiddenFill xmlns="" xmlns:a14="http://schemas.microsoft.com/office/drawing/2010/main">
+              <a14:hiddenFill xmlns:a14="http://schemas.microsoft.com/office/drawing/2010/main" xmlns="">
                 <a:solidFill>
                   <a:srgbClr val="FFFFFF"/>
                 </a:solidFill>
               </a14:hiddenFill>
             </a:ext>
             <a:ext uri="{91240B29-F687-4f45-9708-019B960494DF}">
-              <a14:hiddenLine xmlns="" xmlns:a14="http://schemas.microsoft.com/office/drawing/2010/main" w="9525">
+              <a14:hiddenLine xmlns:a14="http://schemas.microsoft.com/office/drawing/2010/main" xmlns="" w="9525">
                 <a:solidFill>
                   <a:srgbClr val="000000"/>
                 </a:solidFill>
@@ -15475,7 +15492,7 @@
               </a14:hiddenLine>
             </a:ext>
             <a:ext uri="{FAA26D3D-D897-4be2-8F04-BA451C77F1D7}">
-              <ma14:placeholderFlag xmlns="" xmlns:ma14="http://schemas.microsoft.com/office/mac/drawingml/2011/main" val="1"/>
+              <ma14:placeholderFlag xmlns:ma14="http://schemas.microsoft.com/office/mac/drawingml/2011/main" xmlns="" val="1"/>
             </a:ext>
           </a:extLst>
         </p:spPr>
@@ -16259,14 +16276,14 @@
           <a:noFill/>
           <a:extLst>
             <a:ext uri="{909E8E84-426E-40dd-AFC4-6F175D3DCCD1}">
-              <a14:hiddenFill xmlns:a14="http://schemas.microsoft.com/office/drawing/2010/main" xmlns="">
+              <a14:hiddenFill xmlns="" xmlns:a14="http://schemas.microsoft.com/office/drawing/2010/main">
                 <a:solidFill>
                   <a:srgbClr val="FFFFFF"/>
                 </a:solidFill>
               </a14:hiddenFill>
             </a:ext>
             <a:ext uri="{91240B29-F687-4f45-9708-019B960494DF}">
-              <a14:hiddenLine xmlns:a14="http://schemas.microsoft.com/office/drawing/2010/main" xmlns="" w="9525">
+              <a14:hiddenLine xmlns="" xmlns:a14="http://schemas.microsoft.com/office/drawing/2010/main" w="9525">
                 <a:solidFill>
                   <a:srgbClr val="000000"/>
                 </a:solidFill>
@@ -16425,14 +16442,14 @@
           </a:ln>
           <a:extLst>
             <a:ext uri="{909E8E84-426E-40dd-AFC4-6F175D3DCCD1}">
-              <a14:hiddenFill xmlns:a14="http://schemas.microsoft.com/office/drawing/2010/main" xmlns="">
+              <a14:hiddenFill xmlns="" xmlns:a14="http://schemas.microsoft.com/office/drawing/2010/main">
                 <a:solidFill>
                   <a:srgbClr val="FFFFFF"/>
                 </a:solidFill>
               </a14:hiddenFill>
             </a:ext>
             <a:ext uri="{91240B29-F687-4f45-9708-019B960494DF}">
-              <a14:hiddenLine xmlns:a14="http://schemas.microsoft.com/office/drawing/2010/main" xmlns="" w="9525">
+              <a14:hiddenLine xmlns="" xmlns:a14="http://schemas.microsoft.com/office/drawing/2010/main" w="9525">
                 <a:solidFill>
                   <a:srgbClr val="000000"/>
                 </a:solidFill>
@@ -16442,7 +16459,7 @@
               </a14:hiddenLine>
             </a:ext>
             <a:ext uri="{FAA26D3D-D897-4be2-8F04-BA451C77F1D7}">
-              <ma14:placeholderFlag xmlns:ma14="http://schemas.microsoft.com/office/mac/drawingml/2011/main" xmlns="" val="1"/>
+              <ma14:placeholderFlag xmlns="" xmlns:ma14="http://schemas.microsoft.com/office/mac/drawingml/2011/main" val="1"/>
             </a:ext>
           </a:extLst>
         </p:spPr>
@@ -17232,14 +17249,14 @@
           <a:effectLst/>
           <a:extLst>
             <a:ext uri="{909E8E84-426E-40dd-AFC4-6F175D3DCCD1}">
-              <a14:hiddenFill xmlns:a14="http://schemas.microsoft.com/office/drawing/2010/main" xmlns="">
+              <a14:hiddenFill xmlns="" xmlns:a14="http://schemas.microsoft.com/office/drawing/2010/main">
                 <a:solidFill>
                   <a:schemeClr val="accent1"/>
                 </a:solidFill>
               </a14:hiddenFill>
             </a:ext>
             <a:ext uri="{AF507438-7753-43e0-B8FC-AC1667EBCBE1}">
-              <a14:hiddenEffects xmlns:a14="http://schemas.microsoft.com/office/drawing/2010/main" xmlns="">
+              <a14:hiddenEffects xmlns="" xmlns:a14="http://schemas.microsoft.com/office/drawing/2010/main">
                 <a:effectLst>
                   <a:outerShdw blurRad="63500" dist="35921" dir="2700000" algn="ctr" rotWithShape="0">
                     <a:schemeClr val="bg2"/>
@@ -17355,14 +17372,14 @@
           <a:effectLst/>
           <a:extLst>
             <a:ext uri="{909E8E84-426E-40dd-AFC4-6F175D3DCCD1}">
-              <a14:hiddenFill xmlns:a14="http://schemas.microsoft.com/office/drawing/2010/main" xmlns="">
+              <a14:hiddenFill xmlns="" xmlns:a14="http://schemas.microsoft.com/office/drawing/2010/main">
                 <a:solidFill>
                   <a:schemeClr val="accent1"/>
                 </a:solidFill>
               </a14:hiddenFill>
             </a:ext>
             <a:ext uri="{AF507438-7753-43e0-B8FC-AC1667EBCBE1}">
-              <a14:hiddenEffects xmlns:a14="http://schemas.microsoft.com/office/drawing/2010/main" xmlns="">
+              <a14:hiddenEffects xmlns="" xmlns:a14="http://schemas.microsoft.com/office/drawing/2010/main">
                 <a:effectLst>
                   <a:outerShdw blurRad="63500" dist="35921" dir="2700000" algn="ctr" rotWithShape="0">
                     <a:schemeClr val="bg2"/>
